--- a/decks/triple-electromagnetism/triple-electromagnetism_ch4_motors-speakers.pptx
+++ b/decks/triple-electromagnetism/triple-electromagnetism_ch4_motors-speakers.pptx
@@ -125,30 +125,30 @@
   <p:extLst>
     <p:ext uri="{521415D9-36F7-43E2-AB2F-B90AF26B5E84}">
       <p14:sectionLst xmlns:p14="http://schemas.microsoft.com/office/powerpoint/2010/main">
-        <p14:section name="Opening" id="{656efd61-b356-4210-b2cc-e34da54abe17}">
+        <p14:section name="Opening" id="{4355b4c2-b3f9-b2d2-a201-83fdd271055a}">
           <p14:sldIdLst>
             <p14:sldId id="256"/>
           </p14:sldIdLst>
         </p14:section>
-        <p14:section name="Gate" id="{2a56d1e3-7be2-c2fb-7160-9e243901bfb2}">
+        <p14:section name="Gate" id="{a11ab921-58ad-76e2-8165-10e6a226fbcc}">
           <p14:sldIdLst>
             <p14:sldId id="257"/>
             <p14:sldId id="258"/>
           </p14:sldIdLst>
         </p14:section>
-        <p14:section name="Pre-teach" id="{c008d914-c920-bc5f-5208-ea26534c5ea5}">
+        <p14:section name="Pre-teach" id="{7fc0022a-4c9f-51aa-c09a-26de62b0f150}">
           <p14:sldIdLst>
             <p14:sldId id="259"/>
             <p14:sldId id="260"/>
           </p14:sldIdLst>
         </p14:section>
-        <p14:section name="Read-along" id="{5ae41465-e71c-2b0e-7e93-f8a5f57f0374}">
+        <p14:section name="Read-along" id="{1ff37383-54ef-a238-a209-11ddd3e297e7}">
           <p14:sldIdLst>
             <p14:sldId id="261"/>
             <p14:sldId id="262"/>
           </p14:sldIdLst>
         </p14:section>
-        <p14:section name="Teach" id="{e1685da4-4cc8-8c82-ff38-1a34a562e74d}">
+        <p14:section name="Teach" id="{bbfbef60-8bb7-9320-91a5-fd4c654dafb2}">
           <p14:sldIdLst>
             <p14:sldId id="263"/>
             <p14:sldId id="264"/>
@@ -156,7 +156,7 @@
             <p14:sldId id="266"/>
           </p14:sldIdLst>
         </p14:section>
-        <p14:section name="Routes" id="{77facd58-5dd7-2b0a-b6cc-4b9dde45a6b1}">
+        <p14:section name="Routes" id="{fcc01714-3dd1-a077-bfce-f528415f2b5a}">
           <p14:sldIdLst>
             <p14:sldId id="267"/>
             <p14:sldId id="268"/>
@@ -164,12 +164,12 @@
             <p14:sldId id="270"/>
           </p14:sldIdLst>
         </p14:section>
-        <p14:section name="Close" id="{916b3d6c-cc03-158b-3dc5-55b4515c516c}">
+        <p14:section name="Close" id="{85c2974f-c499-38de-6adc-23c5063eb4b8}">
           <p14:sldIdLst>
             <p14:sldId id="271"/>
           </p14:sldIdLst>
         </p14:section>
-        <p14:section name="Answers" id="{cb3105f4-e8a8-3363-b7d6-e1dfa415b81c}">
+        <p14:section name="Answers" id="{0eead6b4-b3f4-3dce-3162-fc92ac5ddc1b}">
           <p14:sldIdLst>
             <p14:sldId id="272"/>
             <p14:sldId id="273"/>
@@ -1233,7 +1233,7 @@
               <a:rPr lang="en-US" dirty="0"/>
               <a:t>Exit ticket — individual, silent, on a slip or mini-whiteboard. Recall before help: no notes, no lanes, no hints. Collect before pupils leave.
 Question: What is the job of the split-ring commutator in a d.c. motor?
-Answer: D   To reverse the current in the coil every half turn. Reversing the current every half turn keeps the forces pushing the coil round in the same direction.
+Answer: C   To reverse the current in the coil every half turn. Reversing the current every half turn keeps the forces pushing the coil round in the same direction.
 Source of this question: gate item 1 re-asked (options rotated) — this chapter has no third quick-check module.
 The ebook also holds task 3, "Explain the motor (6 marks)", for homework or the next lesson's do now.
 Sort the slips: correct → ready to move on; incorrect → start next lesson in the pre-teach group, with the read-along and the Support lane. Same destination next time.</a:t>
@@ -1507,7 +1507,7 @@
             <a:r>
               <a:rPr lang="en-US" dirty="0"/>
               <a:t>Answers — exit ticket: Exit ticket. Reveal the answer; pupils mark their own work in a different colour, then read the "why" together. Same destination for every lane, so one answer serves the whole class.
-Answer: D   To reverse the current in the coil every half turn
+Answer: C   To reverse the current in the coil every half turn
 Why: Reversing the current every half turn keeps the forces pushing the coil round in the same direction.
 Ask a Support pupil to explain one step, and a Stretch pupil to share their extension.</a:t>
             </a:r>
@@ -1598,9 +1598,9 @@
             <a:r>
               <a:rPr lang="en-US" dirty="0"/>
               <a:t>Do now — retrieval. Silent, no notes, no help: recall comes before any support. Give about four minutes.
-1. What is the job of the split-ring commutator in a d.c. motor?  →  A   To reverse the current in the coil every half turn
+1. What is the job of the split-ring commutator in a d.c. motor?  →  D   To reverse the current in the coil every half turn
 2. A loudspeaker is supplied with an ___ current, so the force on its coil keeps changing direction.  →  alternating
-3. Why do the two long sides of a motor coil feel forces in opposite directions?  →  A   The current in them flows in opposite directions
+3. Why do the two long sides of a motor coil feel forces in opposite directions?  →  D   The current in them flows in opposite directions
 Circulate: who gets 3/3 (Stretch route), 2/3 (Core), 0–1 (Support)? Use this to route pupils later in the lesson.</a:t>
             </a:r>
             <a:endParaRPr lang="en-US" dirty="0"/>
@@ -1690,9 +1690,9 @@
             <a:r>
               <a:rPr lang="en-US" dirty="0"/>
               <a:t>Answers — pupils mark their own in a different colour, then hands up for 3/3, 2/3, 1/3.
-1. A   To reverse the current in the coil every half turn. Reversing the current every half turn keeps the forces pushing the coil round in the same direction.
+1. D   To reverse the current in the coil every half turn. Reversing the current every half turn keeps the forces pushing the coil round in the same direction.
 2. alternating. An alternating current reverses direction repeatedly, so the force on the coil reverses and the cone vibrates.
-3. A   The current in them flows in opposite directions. The current goes up one side and down the other; with the same field, the left-hand rule gives opposite forces.
+3. D   The current in them flows in opposite directions. The current goes up one side and down the other; with the same field, the left-hand rule gives opposite forces.
 Say the route each score points to: 3/3 Stretch, 2/3 Core, 0–1 Support. Pupils may choose to move up.</a:t>
             </a:r>
             <a:endParaRPr lang="en-US" dirty="0"/>
@@ -7161,7 +7161,7 @@
                 <a:ea typeface="Calibri" pitchFamily="34" charset="-122"/>
                 <a:cs typeface="Calibri" pitchFamily="34" charset="-120"/>
               </a:rPr>
-              <a:t>The permanent magnet switches its poles round</a:t>
+              <a:t>Sound waves from the room push the cone</a:t>
             </a:r>
             <a:endParaRPr lang="en-US" sz="2600" dirty="0"/>
           </a:p>
@@ -7235,7 +7235,7 @@
                 <a:ea typeface="Calibri" pitchFamily="34" charset="-122"/>
                 <a:cs typeface="Calibri" pitchFamily="34" charset="-120"/>
               </a:rPr>
-              <a:t>Sound waves from the room push the cone</a:t>
+              <a:t>The permanent magnet switches its poles round</a:t>
             </a:r>
             <a:endParaRPr lang="en-US" sz="2600" dirty="0"/>
           </a:p>
@@ -8639,7 +8639,7 @@
                 <a:ea typeface="Calibri" pitchFamily="34" charset="-122"/>
                 <a:cs typeface="Calibri" pitchFamily="34" charset="-120"/>
               </a:rPr>
-              <a:t>To make the magnetic field stronger</a:t>
+              <a:t>To stop the coil overheating</a:t>
             </a:r>
             <a:endParaRPr lang="en-US" sz="2400" dirty="0"/>
           </a:p>
@@ -8676,7 +8676,7 @@
                 <a:ea typeface="Calibri" pitchFamily="34" charset="-122"/>
                 <a:cs typeface="Calibri" pitchFamily="34" charset="-120"/>
               </a:rPr>
-              <a:t>To stop the coil overheating</a:t>
+              <a:t>To hold the magnets in place</a:t>
             </a:r>
             <a:endParaRPr lang="en-US" sz="2400" dirty="0"/>
           </a:p>
@@ -8713,7 +8713,7 @@
                 <a:ea typeface="Calibri" pitchFamily="34" charset="-122"/>
                 <a:cs typeface="Calibri" pitchFamily="34" charset="-120"/>
               </a:rPr>
-              <a:t>To hold the magnets in place</a:t>
+              <a:t>To reverse the current in the coil every half turn</a:t>
             </a:r>
             <a:endParaRPr lang="en-US" sz="2400" dirty="0"/>
           </a:p>
@@ -8750,7 +8750,7 @@
                 <a:ea typeface="Calibri" pitchFamily="34" charset="-122"/>
                 <a:cs typeface="Calibri" pitchFamily="34" charset="-120"/>
               </a:rPr>
-              <a:t>To reverse the current in the coil every half turn</a:t>
+              <a:t>To make the magnetic field stronger</a:t>
             </a:r>
             <a:endParaRPr lang="en-US" sz="2400" dirty="0"/>
           </a:p>
@@ -10221,7 +10221,7 @@
                 <a:ea typeface="Cambria" pitchFamily="34" charset="-122"/>
                 <a:cs typeface="Cambria" pitchFamily="34" charset="-120"/>
               </a:rPr>
-              <a:t>D   To reverse the current in the coil every half turn</a:t>
+              <a:t>C   To reverse the current in the coil every half turn</a:t>
             </a:r>
             <a:endParaRPr lang="en-US" sz="1800" dirty="0"/>
           </a:p>
@@ -10755,7 +10755,7 @@
                 <a:ea typeface="Calibri" pitchFamily="34" charset="-122"/>
                 <a:cs typeface="Calibri" pitchFamily="34" charset="-120"/>
               </a:rPr>
-              <a:t>To reverse the current in the coil every half turn</a:t>
+              <a:t>To make the magnetic field stronger</a:t>
             </a:r>
             <a:endParaRPr lang="en-US" sz="2000" dirty="0"/>
           </a:p>
@@ -10792,7 +10792,7 @@
                 <a:ea typeface="Calibri" pitchFamily="34" charset="-122"/>
                 <a:cs typeface="Calibri" pitchFamily="34" charset="-120"/>
               </a:rPr>
-              <a:t>To make the magnetic field stronger</a:t>
+              <a:t>To stop the coil overheating</a:t>
             </a:r>
             <a:endParaRPr lang="en-US" sz="2000" dirty="0"/>
           </a:p>
@@ -10829,7 +10829,7 @@
                 <a:ea typeface="Calibri" pitchFamily="34" charset="-122"/>
                 <a:cs typeface="Calibri" pitchFamily="34" charset="-120"/>
               </a:rPr>
-              <a:t>To stop the coil overheating</a:t>
+              <a:t>To hold the magnets in place</a:t>
             </a:r>
             <a:endParaRPr lang="en-US" sz="2000" dirty="0"/>
           </a:p>
@@ -10866,7 +10866,7 @@
                 <a:ea typeface="Calibri" pitchFamily="34" charset="-122"/>
                 <a:cs typeface="Calibri" pitchFamily="34" charset="-120"/>
               </a:rPr>
-              <a:t>To hold the magnets in place</a:t>
+              <a:t>To reverse the current in the coil every half turn</a:t>
             </a:r>
             <a:endParaRPr lang="en-US" sz="2000" dirty="0"/>
           </a:p>
@@ -11268,7 +11268,7 @@
                 <a:ea typeface="Calibri" pitchFamily="34" charset="-122"/>
                 <a:cs typeface="Calibri" pitchFamily="34" charset="-120"/>
               </a:rPr>
-              <a:t>The current in them flows in opposite directions</a:t>
+              <a:t>One side is nearer the north pole</a:t>
             </a:r>
             <a:endParaRPr lang="en-US" sz="1800" dirty="0"/>
           </a:p>
@@ -11305,7 +11305,7 @@
                 <a:ea typeface="Calibri" pitchFamily="34" charset="-122"/>
                 <a:cs typeface="Calibri" pitchFamily="34" charset="-120"/>
               </a:rPr>
-              <a:t>They are made of different metals</a:t>
+              <a:t>The field is stronger on one side</a:t>
             </a:r>
             <a:endParaRPr lang="en-US" sz="1800" dirty="0"/>
           </a:p>
@@ -11342,7 +11342,7 @@
                 <a:ea typeface="Calibri" pitchFamily="34" charset="-122"/>
                 <a:cs typeface="Calibri" pitchFamily="34" charset="-120"/>
               </a:rPr>
-              <a:t>One side is nearer the north pole</a:t>
+              <a:t>They are made of different metals</a:t>
             </a:r>
             <a:endParaRPr lang="en-US" sz="1800" dirty="0"/>
           </a:p>
@@ -11379,7 +11379,7 @@
                 <a:ea typeface="Calibri" pitchFamily="34" charset="-122"/>
                 <a:cs typeface="Calibri" pitchFamily="34" charset="-120"/>
               </a:rPr>
-              <a:t>The field is stronger on one side</a:t>
+              <a:t>The current in them flows in opposite directions</a:t>
             </a:r>
             <a:endParaRPr lang="en-US" sz="1800" dirty="0"/>
           </a:p>
@@ -11780,7 +11780,7 @@
                 <a:ea typeface="Calibri" pitchFamily="34" charset="-122"/>
                 <a:cs typeface="Calibri" pitchFamily="34" charset="-120"/>
               </a:rPr>
-              <a:t>A   To reverse the current in the coil every half turn</a:t>
+              <a:t>D   To reverse the current in the coil every half turn</a:t>
             </a:r>
             <a:endParaRPr lang="en-US" sz="2200" dirty="0"/>
           </a:p>
@@ -12260,7 +12260,7 @@
                 <a:ea typeface="Calibri" pitchFamily="34" charset="-122"/>
                 <a:cs typeface="Calibri" pitchFamily="34" charset="-120"/>
               </a:rPr>
-              <a:t>A   The current in them flows in opposite directions</a:t>
+              <a:t>D   The current in them flows in opposite directions</a:t>
             </a:r>
             <a:endParaRPr lang="en-US" sz="2200" dirty="0"/>
           </a:p>

--- a/decks/triple-electromagnetism/triple-electromagnetism_ch4_motors-speakers.pptx
+++ b/decks/triple-electromagnetism/triple-electromagnetism_ch4_motors-speakers.pptx
@@ -125,30 +125,30 @@
   <p:extLst>
     <p:ext uri="{521415D9-36F7-43E2-AB2F-B90AF26B5E84}">
       <p14:sectionLst xmlns:p14="http://schemas.microsoft.com/office/powerpoint/2010/main">
-        <p14:section name="Opening" id="{4355b4c2-b3f9-b2d2-a201-83fdd271055a}">
+        <p14:section name="Opening" id="{4f5e77d6-7a64-1257-34c8-3b5db3d7073d}">
           <p14:sldIdLst>
             <p14:sldId id="256"/>
           </p14:sldIdLst>
         </p14:section>
-        <p14:section name="Gate" id="{a11ab921-58ad-76e2-8165-10e6a226fbcc}">
+        <p14:section name="Gate" id="{91dda581-7b5c-cc9e-ece3-25d176cf602d}">
           <p14:sldIdLst>
             <p14:sldId id="257"/>
             <p14:sldId id="258"/>
           </p14:sldIdLst>
         </p14:section>
-        <p14:section name="Pre-teach" id="{7fc0022a-4c9f-51aa-c09a-26de62b0f150}">
+        <p14:section name="Pre-teach" id="{22b64c95-21f2-6517-af4c-f06e7da7ae3b}">
           <p14:sldIdLst>
             <p14:sldId id="259"/>
             <p14:sldId id="260"/>
           </p14:sldIdLst>
         </p14:section>
-        <p14:section name="Read-along" id="{1ff37383-54ef-a238-a209-11ddd3e297e7}">
+        <p14:section name="Read-along" id="{1e3f1792-87a8-a533-5e4a-620978d479b6}">
           <p14:sldIdLst>
             <p14:sldId id="261"/>
             <p14:sldId id="262"/>
           </p14:sldIdLst>
         </p14:section>
-        <p14:section name="Teach" id="{bbfbef60-8bb7-9320-91a5-fd4c654dafb2}">
+        <p14:section name="Teach" id="{41e0610c-46e2-9608-48d9-6cc5d2e59f94}">
           <p14:sldIdLst>
             <p14:sldId id="263"/>
             <p14:sldId id="264"/>
@@ -156,7 +156,7 @@
             <p14:sldId id="266"/>
           </p14:sldIdLst>
         </p14:section>
-        <p14:section name="Routes" id="{fcc01714-3dd1-a077-bfce-f528415f2b5a}">
+        <p14:section name="Routes" id="{5658cad0-343b-db79-2bd4-779cb1b15b23}">
           <p14:sldIdLst>
             <p14:sldId id="267"/>
             <p14:sldId id="268"/>
@@ -164,12 +164,12 @@
             <p14:sldId id="270"/>
           </p14:sldIdLst>
         </p14:section>
-        <p14:section name="Close" id="{85c2974f-c499-38de-6adc-23c5063eb4b8}">
+        <p14:section name="Close" id="{500f2dea-13e3-6a0c-a3e3-69f494f71fb7}">
           <p14:sldIdLst>
             <p14:sldId id="271"/>
           </p14:sldIdLst>
         </p14:section>
-        <p14:section name="Answers" id="{0eead6b4-b3f4-3dce-3162-fc92ac5ddc1b}">
+        <p14:section name="Answers" id="{2ae795d9-6be3-eb16-5231-5046f6bf3857}">
           <p14:sldIdLst>
             <p14:sldId id="272"/>
             <p14:sldId id="273"/>
